--- a/project1/docs/智能问答系统_实施过程.pptx
+++ b/project1/docs/智能问答系统_实施过程.pptx
@@ -520,10 +520,27 @@
           <a:lstStyle/>
           <a:p>
             <a:r>
-              <a:rPr lang="en-US" dirty="0"/>
-              <a:t/>
-            </a:r>
-            <a:endParaRPr lang="en-US" dirty="0"/>
+              <a:rPr/>
+              <a:t>【开场 · 约 40 秒，态度自信】</a:t>
+            </a:r>
+          </a:p>
+          <a:p>
+            <a:r>
+              <a:rPr/>
+              <a:t>我们组做的是基于《The Anabolic Cookbook 2.0》的课程知识问答系统。教材 205 页、209 条书签，切成了 159 个知识块。</a:t>
+            </a:r>
+          </a:p>
+          <a:p>
+            <a:r>
+              <a:rPr/>
+              <a:t>一句话说清它和普通 ChatGPT 的区别：它只认这本书，每个事实都带页码，书里没有的它就说不知道。</a:t>
+            </a:r>
+          </a:p>
+          <a:p>
+            <a:r>
+              <a:rPr/>
+              <a:t>50 道题实测：准确率 89.7%，拒答正确率 90.5%，页码引用覆盖率 100%。</a:t>
+            </a:r>
           </a:p>
         </p:txBody>
       </p:sp>
@@ -608,10 +625,21 @@
           <a:lstStyle/>
           <a:p>
             <a:r>
-              <a:rPr lang="en-US" dirty="0"/>
-              <a:t/>
-            </a:r>
-            <a:endParaRPr lang="en-US" dirty="0"/>
+              <a:rPr/>
+              <a:t>【测试结果 · 约 25 秒，亮数据要有停顿】</a:t>
+            </a:r>
+          </a:p>
+          <a:p>
+            <a:r>
+              <a:rPr/>
+              <a:t>准确率 89.7%，拒答正确率 90.5%，页码引用覆盖率 100%，幻觉 2 条。</a:t>
+            </a:r>
+          </a:p>
+          <a:p>
+            <a:r>
+              <a:rPr/>
+              <a:t>硬线是准确率和拒答率都 ≥70%，我们两条都超了。</a:t>
+            </a:r>
           </a:p>
         </p:txBody>
       </p:sp>
@@ -696,10 +724,21 @@
           <a:lstStyle/>
           <a:p>
             <a:r>
-              <a:rPr lang="en-US" dirty="0"/>
-              <a:t/>
-            </a:r>
-            <a:endParaRPr lang="en-US" dirty="0"/>
+              <a:rPr/>
+              <a:t>【四轮迭代 · 约 40 秒，最能证明「真做过」的一段】</a:t>
+            </a:r>
+          </a:p>
+          <a:p>
+            <a:r>
+              <a:rPr/>
+              <a:t>第二轮我们加了一整套混合召回，指标一点没动。把实际喂给大模型的 context 打印出来才发现——组装时写了 text[:2000]，全书 38% 的块超过 2000 字，答案被截掉半截。检索是对的，模型看不到。</a:t>
+            </a:r>
+          </a:p>
+          <a:p>
+            <a:r>
+              <a:rPr/>
+              <a:t>修完这个 bug 指标才动。一句话总结：指标不动的时候，先查数据管道，别急着换算法。</a:t>
+            </a:r>
           </a:p>
         </p:txBody>
       </p:sp>
@@ -784,10 +823,21 @@
           <a:lstStyle/>
           <a:p>
             <a:r>
-              <a:rPr lang="en-US" dirty="0"/>
-              <a:t/>
-            </a:r>
-            <a:endParaRPr lang="en-US" dirty="0"/>
+              <a:rPr/>
+              <a:t>【失败案例 1 · 约 30 秒，选这个讲】</a:t>
+            </a:r>
+          </a:p>
+          <a:p>
+            <a:r>
+              <a:rPr/>
+              <a:t>原文 ground turkey（火鸡肉），系统答成「鸡胸肉或牛肉末」。页码对、步骤对，只有食材被替换。</a:t>
+            </a:r>
+          </a:p>
+          <a:p>
+            <a:r>
+              <a:rPr/>
+              <a:t>根因：瑞典肉丸的常识做法就是牛肉猪肉，模型的世界知识压过了教材原文——这是最隐蔽的违规，它不编数字，它换实体。光靠提示词不够，得在生成后做实体比对。</a:t>
+            </a:r>
           </a:p>
         </p:txBody>
       </p:sp>
@@ -872,10 +922,15 @@
           <a:lstStyle/>
           <a:p>
             <a:r>
-              <a:rPr lang="en-US" dirty="0"/>
-              <a:t/>
-            </a:r>
-            <a:endParaRPr lang="en-US" dirty="0"/>
+              <a:rPr/>
+              <a:t>【失败案例 2 · 约 15 秒，快过】</a:t>
+            </a:r>
+          </a:p>
+          <a:p>
+            <a:r>
+              <a:rPr/>
+              <a:t>表格被压平的问题：旧版把表格拉成一行，系统答 16 tbsp，实际是 8 tbsp。修复后 21 个数据表变成结构化块，数值类问题全对了。</a:t>
+            </a:r>
           </a:p>
         </p:txBody>
       </p:sp>
@@ -960,10 +1015,51 @@
           <a:lstStyle/>
           <a:p>
             <a:r>
-              <a:rPr lang="en-US" dirty="0"/>
-              <a:t/>
-            </a:r>
-            <a:endParaRPr lang="en-US" dirty="0"/>
+              <a:rPr/>
+              <a:t>【现场演示 · 约 3 分钟，边点边讲】</a:t>
+            </a:r>
+          </a:p>
+          <a:p>
+            <a:r>
+              <a:rPr/>
+              <a:t>题 1 课内：What temperature and how long should I bake egg white bites?</a:t>
+            </a:r>
+          </a:p>
+          <a:p>
+            <a:r>
+              <a:rPr/>
+              <a:t>预期：烤箱 400°F/204°C、10 分钟【p.27】。讲解：不只是答案，还标了页码，可以现场翻 p.27 核对。</a:t>
+            </a:r>
+          </a:p>
+          <a:p>
+            <a:r>
+              <a:rPr/>
+              <a:t>题 2 课外：What is the capital of France?</a:t>
+            </a:r>
+          </a:p>
+          <a:p>
+            <a:r>
+              <a:rPr/>
+              <a:t>预期：拒答。讲解：检索分 0.009，第一层直接拦，大模型根本没调用——零幻觉风险。</a:t>
+            </a:r>
+          </a:p>
+          <a:p>
+            <a:r>
+              <a:rPr/>
+              <a:t>题 3 陷阱：How do I make sushi rolls at home?</a:t>
+            </a:r>
+          </a:p>
+          <a:p>
+            <a:r>
+              <a:rPr/>
+              <a:t>预期：拒答。讲解：寿司全书没出现过，但句式和其他菜谱高度相似，系统仍正确拒答。</a:t>
+            </a:r>
+          </a:p>
+          <a:p>
+            <a:r>
+              <a:rPr/>
+              <a:t>备选（时间够）：Which protein powder brand should I buy? 检索分 0.579 过阈值，靠第二层 LLM 拒答——这题最能体现两层拒答的价值。</a:t>
+            </a:r>
           </a:p>
         </p:txBody>
       </p:sp>
@@ -1048,10 +1144,15 @@
           <a:lstStyle/>
           <a:p>
             <a:r>
-              <a:rPr lang="en-US" dirty="0"/>
-              <a:t/>
-            </a:r>
-            <a:endParaRPr lang="en-US" dirty="0"/>
+              <a:rPr/>
+              <a:t>【工程规范 · 约 10 秒，快过】</a:t>
+            </a:r>
+          </a:p>
+          <a:p>
+            <a:r>
+              <a:rPr/>
+              <a:t>一键脚本、密钥隔离（环境变量，入库存 .env.example）、评测可复现。</a:t>
+            </a:r>
           </a:p>
         </p:txBody>
       </p:sp>
@@ -1136,10 +1237,15 @@
           <a:lstStyle/>
           <a:p>
             <a:r>
-              <a:rPr lang="en-US" dirty="0"/>
-              <a:t/>
-            </a:r>
-            <a:endParaRPr lang="en-US" dirty="0"/>
+              <a:rPr/>
+              <a:t>【拓展挑战 · 约 15 秒】</a:t>
+            </a:r>
+          </a:p>
+          <a:p>
+            <a:r>
+              <a:rPr/>
+              <a:t>做了三项：中文查询翻译层、多语言双库自动切换、换书验证（《原子习惯》58 块，管线与教材解耦）。</a:t>
+            </a:r>
           </a:p>
         </p:txBody>
       </p:sp>
@@ -1224,10 +1330,15 @@
           <a:lstStyle/>
           <a:p>
             <a:r>
-              <a:rPr lang="en-US" dirty="0"/>
-              <a:t/>
-            </a:r>
-            <a:endParaRPr lang="en-US" dirty="0"/>
+              <a:rPr/>
+              <a:t>【翻译层 · 约 20 秒，本轮新增】</a:t>
+            </a:r>
+          </a:p>
+          <a:p>
+            <a:r>
+              <a:rPr/>
+              <a:t>发现中文提问英文书 25% 失效——不是检索坏，是中文问句对英文表意能力弱。加翻译层后失效率降到 0，英文题零影响（触发 0 次）。</a:t>
+            </a:r>
           </a:p>
         </p:txBody>
       </p:sp>
@@ -1312,10 +1423,15 @@
           <a:lstStyle/>
           <a:p>
             <a:r>
-              <a:rPr lang="en-US" dirty="0"/>
-              <a:t/>
-            </a:r>
-            <a:endParaRPr lang="en-US" dirty="0"/>
+              <a:rPr/>
+              <a:t>【转人工 · 约 15 秒，本轮新增】</a:t>
+            </a:r>
+          </a:p>
+          <a:p>
+            <a:r>
+              <a:rPr/>
+              <a:t>拒答时给用户一条出路：选择转人工咨询，记录工单。课程要求「说不知道」是底线，给出口才是闭环。</a:t>
+            </a:r>
           </a:p>
         </p:txBody>
       </p:sp>
@@ -1400,10 +1516,21 @@
           <a:lstStyle/>
           <a:p>
             <a:r>
-              <a:rPr lang="en-US" dirty="0"/>
-              <a:t/>
-            </a:r>
-            <a:endParaRPr lang="en-US" dirty="0"/>
+              <a:rPr/>
+              <a:t>【不足与下一步 · 约 30 秒，收尾第一部分】</a:t>
+            </a:r>
+          </a:p>
+          <a:p>
+            <a:r>
+              <a:rPr/>
+              <a:t>不足说真话：2 条幻觉（实体替换）没用上后处理校验；转人工是本地工单记录，没接真实客服系统。</a:t>
+            </a:r>
+          </a:p>
+          <a:p>
+            <a:r>
+              <a:rPr/>
+              <a:t>下一步会先做生成后实体比对，再扩多跳能力。</a:t>
+            </a:r>
           </a:p>
         </p:txBody>
       </p:sp>
@@ -1488,10 +1615,21 @@
           <a:lstStyle/>
           <a:p>
             <a:r>
-              <a:rPr lang="en-US" dirty="0"/>
-              <a:t/>
-            </a:r>
-            <a:endParaRPr lang="en-US" dirty="0"/>
+              <a:rPr/>
+              <a:t>【背景 · 约 20 秒，语速快】</a:t>
+            </a:r>
+          </a:p>
+          <a:p>
+            <a:r>
+              <a:rPr/>
+              <a:t>为什么做这个？课程调研里发现通用大模型有两个致命问题：一是编造细节数字，二是给不出可核查的页码。</a:t>
+            </a:r>
+          </a:p>
+          <a:p>
+            <a:r>
+              <a:rPr/>
+              <a:t>我们的目标就是治这两个病：每个答案都能翻回原书核对，查不到就明说不知道。</a:t>
+            </a:r>
           </a:p>
         </p:txBody>
       </p:sp>
@@ -1576,10 +1714,27 @@
           <a:lstStyle/>
           <a:p>
             <a:r>
-              <a:rPr lang="en-US" dirty="0"/>
-              <a:t/>
-            </a:r>
-            <a:endParaRPr lang="en-US" dirty="0"/>
+              <a:rPr/>
+              <a:t>【总结与分工 · 约 60 秒，收尾第二部分】</a:t>
+            </a:r>
+          </a:p>
+          <a:p>
+            <a:r>
+              <a:rPr/>
+              <a:t>最大收获不是做出了系统，而是学会用 A/B 数据做决策——6 次关键决策全留痕，其中 2 次被自己的实测推翻。</a:t>
+            </a:r>
+          </a:p>
+          <a:p>
+            <a:r>
+              <a:rPr/>
+              <a:t>分工：我负责整体设计和主讲（全组答辩一人完成），傅卓凝模型选型、陈涵飞知识库、陈芝聪评测。代码 AI 辅助生成，我们负责需求定义、方案取舍、结果验收。</a:t>
+            </a:r>
+          </a:p>
+          <a:p>
+            <a:r>
+              <a:rPr/>
+              <a:t>谢谢老师，欢迎提问。</a:t>
+            </a:r>
           </a:p>
         </p:txBody>
       </p:sp>
@@ -1664,10 +1819,21 @@
           <a:lstStyle/>
           <a:p>
             <a:r>
-              <a:rPr lang="en-US" dirty="0"/>
-              <a:t/>
-            </a:r>
-            <a:endParaRPr lang="en-US" dirty="0"/>
+              <a:rPr/>
+              <a:t>【选型 · 约 20 秒，一句话带过】</a:t>
+            </a:r>
+          </a:p>
+          <a:p>
+            <a:r>
+              <a:rPr/>
+              <a:t>平台上我们试过官方知识库，但回答不带页码、不能控制分块，所以自建了一条 RAG 管线——检索和引用完全自己掌控。</a:t>
+            </a:r>
+          </a:p>
+          <a:p>
+            <a:r>
+              <a:rPr/>
+              <a:t>这页不细讲，下页看全链路。</a:t>
+            </a:r>
           </a:p>
         </p:txBody>
       </p:sp>
@@ -1752,10 +1918,21 @@
           <a:lstStyle/>
           <a:p>
             <a:r>
-              <a:rPr lang="en-US" dirty="0"/>
-              <a:t/>
-            </a:r>
-            <a:endParaRPr lang="en-US" dirty="0"/>
+              <a:rPr/>
+              <a:t>【架构 · 约 30 秒】</a:t>
+            </a:r>
+          </a:p>
+          <a:p>
+            <a:r>
+              <a:rPr/>
+              <a:t>一页看懂：离线侧把教材切成 159 块、生成向量；在线侧检索、组装、生成、强制带页码。</a:t>
+            </a:r>
+          </a:p>
+          <a:p>
+            <a:r>
+              <a:rPr/>
+              <a:t>整条链路的核心约束就一条：生成阶段只许用检索到的资料，禁止外部知识。</a:t>
+            </a:r>
           </a:p>
         </p:txBody>
       </p:sp>
@@ -1840,10 +2017,21 @@
           <a:lstStyle/>
           <a:p>
             <a:r>
-              <a:rPr lang="en-US" dirty="0"/>
-              <a:t/>
-            </a:r>
-            <a:endParaRPr lang="en-US" dirty="0"/>
+              <a:rPr/>
+              <a:t>【知识库构建 · 约 25 秒，技术要点 1】</a:t>
+            </a:r>
+          </a:p>
+          <a:p>
+            <a:r>
+              <a:rPr/>
+              <a:t>分块策略是全系统最重要的决策。菜谱书是「一道菜一个章节」，按固定字数切会把配料和步骤劈开，回答必然残缺。</a:t>
+            </a:r>
+          </a:p>
+          <a:p>
+            <a:r>
+              <a:rPr/>
+              <a:t>所以我们按书签章节切：159 块覆盖 142 个章节，87% 的章节正好一块。</a:t>
+            </a:r>
           </a:p>
         </p:txBody>
       </p:sp>
@@ -1928,10 +2116,15 @@
           <a:lstStyle/>
           <a:p>
             <a:r>
-              <a:rPr lang="en-US" dirty="0"/>
-              <a:t/>
-            </a:r>
-            <a:endParaRPr lang="en-US" dirty="0"/>
+              <a:rPr/>
+              <a:t>【检索工具 · 约 20 秒】</a:t>
+            </a:r>
+          </a:p>
+          <a:p>
+            <a:r>
+              <a:rPr/>
+              <a:t>检索用混合召回：向量 0.6 + 关键词 0.4。纯向量查不准数字类问题（比如 325°F），关键词能兜这类漏洞。</a:t>
+            </a:r>
           </a:p>
         </p:txBody>
       </p:sp>
@@ -2016,10 +2209,15 @@
           <a:lstStyle/>
           <a:p>
             <a:r>
-              <a:rPr lang="en-US" dirty="0"/>
-              <a:t/>
-            </a:r>
-            <a:endParaRPr lang="en-US" dirty="0"/>
+              <a:rPr/>
+              <a:t>【提示词 · 约 20 秒，挑 R3 讲】</a:t>
+            </a:r>
+          </a:p>
+          <a:p>
+            <a:r>
+              <a:rPr/>
+              <a:t>系统提示词 R1 到 R6 逐条落地，最关键是 R3：每个事实必须带【教材 p.N】页码，不允许说「根据资料」这种模糊引用。</a:t>
+            </a:r>
           </a:p>
         </p:txBody>
       </p:sp>
@@ -2104,10 +2302,21 @@
           <a:lstStyle/>
           <a:p>
             <a:r>
-              <a:rPr lang="en-US" dirty="0"/>
-              <a:t/>
-            </a:r>
-            <a:endParaRPr lang="en-US" dirty="0"/>
+              <a:rPr/>
+              <a:t>【拒答机制 · 约 30 秒，技术要点 2，全组最亮的点之一】</a:t>
+            </a:r>
+          </a:p>
+          <a:p>
+            <a:r>
+              <a:rPr/>
+              <a:t>两层拒答：第一层检索阈值，分低于 0.3 直接拦，大模型根本不调用；第二层 LLM 读完资料判断资料里到底有没有答案。</a:t>
+            </a:r>
+          </a:p>
+          <a:p>
+            <a:r>
+              <a:rPr/>
+              <a:t>只靠阈值会漏——书里出现过 protein powder，问品牌时检索分 0.579 能过阈值，但第二层 LLM 正确拒答了。只靠 LLM 会飘，所以必须两层。</a:t>
+            </a:r>
           </a:p>
         </p:txBody>
       </p:sp>
@@ -2192,10 +2401,21 @@
           <a:lstStyle/>
           <a:p>
             <a:r>
-              <a:rPr lang="en-US" dirty="0"/>
-              <a:t/>
-            </a:r>
-            <a:endParaRPr lang="en-US" dirty="0"/>
+              <a:rPr/>
+              <a:t>【测试方法 · 约 15 秒】</a:t>
+            </a:r>
+          </a:p>
+          <a:p>
+            <a:r>
+              <a:rPr/>
+              <a:t>评测集 50 条，严格按课程脚手架配比：课内 30、课外 10、诱导 5、模糊 5，正好 60/20/10/10。</a:t>
+            </a:r>
+          </a:p>
+          <a:p>
+            <a:r>
+              <a:rPr/>
+              <a:t>另外留了 5 条 holdout 答辩现场抽，不参与调优。</a:t>
+            </a:r>
           </a:p>
         </p:txBody>
       </p:sp>

--- a/project1/docs/智能问答系统_实施过程.pptx
+++ b/project1/docs/智能问答系统_实施过程.pptx
@@ -1017,6 +1017,18 @@
             <a:r>
               <a:rPr/>
               <a:t>【现场演示 · 约 3 分钟，边点边讲】</a:t>
+            </a:r>
+          </a:p>
+          <a:p>
+            <a:r>
+              <a:rPr/>
+              <a:t>启动：cd project1 然后 python webui.py，浏览器打开 127.0.0.1:8000。</a:t>
+            </a:r>
+          </a:p>
+          <a:p>
+            <a:r>
+              <a:rPr/>
+              <a:t>如果断网或卡住：换 python demo_offline.py 读留痕，说「这是之前真实跑过的结果，网络不好，我们看留痕」。</a:t>
             </a:r>
           </a:p>
           <a:p>
